--- a/presentation/0804_9_Kyber-PKE.pptx
+++ b/presentation/0804_9_Kyber-PKE.pptx
@@ -11919,8 +11919,8 @@
           </a:p>
         </p:txBody>
       </p:sp>
-      <mc:AlternateContent xmlns:mc="http://schemas.openxmlformats.org/markup-compatibility/2006" xmlns:a14="http://schemas.microsoft.com/office/drawing/2010/main">
-        <mc:Choice Requires="a14">
+      <mc:AlternateContent xmlns:mc="http://schemas.openxmlformats.org/markup-compatibility/2006">
+        <mc:Choice xmlns:a14="http://schemas.microsoft.com/office/drawing/2010/main" Requires="a14">
           <p:sp>
             <p:nvSpPr>
               <p:cNvPr id="3" name="내용 개체 틀 2">
@@ -11948,7 +11948,11 @@
                 </a:r>
                 <a:r>
                   <a:rPr lang="en-US" altLang="ko-KR" dirty="0" err="1"/>
-                  <a:t>Round_q</a:t>
+                  <a:t>Round</a:t>
+                </a:r>
+                <a:r>
+                  <a:rPr lang="en-US" altLang="ko-KR" baseline="-25000" dirty="0" err="1"/>
+                  <a:t>q</a:t>
                 </a:r>
                 <a:r>
                   <a:rPr lang="en-US" altLang="ko-KR" dirty="0"/>
@@ -13045,7 +13049,7 @@
             </p:txBody>
           </p:sp>
         </mc:Choice>
-        <mc:Fallback xmlns="">
+        <mc:Fallback>
           <p:sp>
             <p:nvSpPr>
               <p:cNvPr id="3" name="내용 개체 틀 2">
